--- a/ArtEx_Pitch_Deck.pptx
+++ b/ArtEx_Pitch_Deck.pptx
@@ -4013,7 +4013,7 @@
           <a:lstStyle/>
           <a:p>
             <a:r>
-              <a:rPr sz="1300">
+              <a:rPr sz="1300" dirty="0">
                 <a:solidFill>
                   <a:srgbClr val="9CA3AF"/>
                 </a:solidFill>
@@ -4737,7 +4737,7 @@
         <p:spPr>
           <a:xfrm>
             <a:off x="731520" y="1005840"/>
-            <a:ext cx="10698480" cy="1005840"/>
+            <a:ext cx="6009939" cy="646331"/>
           </a:xfrm>
           <a:prstGeom prst="rect">
             <a:avLst/>
@@ -4752,7 +4752,7 @@
           <a:p>
             <a:pPr algn="l"/>
             <a:r>
-              <a:rPr sz="3600" b="0" i="1">
+              <a:rPr sz="3600" b="0" i="1" dirty="0">
                 <a:solidFill>
                   <a:srgbClr val="FFFFFF"/>
                 </a:solidFill>
@@ -4914,7 +4914,7 @@
           <a:lstStyle/>
           <a:p>
             <a:r>
-              <a:rPr sz="1300">
+              <a:rPr sz="1300" dirty="0">
                 <a:solidFill>
                   <a:srgbClr val="E8552A"/>
                 </a:solidFill>
@@ -4948,7 +4948,7 @@
           <a:lstStyle/>
           <a:p>
             <a:r>
-              <a:rPr sz="1300">
+              <a:rPr sz="1300" dirty="0">
                 <a:solidFill>
                   <a:srgbClr val="F59E0B"/>
                 </a:solidFill>
@@ -4982,7 +4982,7 @@
           <a:lstStyle/>
           <a:p>
             <a:r>
-              <a:rPr sz="1200">
+              <a:rPr sz="1200" dirty="0">
                 <a:solidFill>
                   <a:srgbClr val="9CA3AF"/>
                 </a:solidFill>
@@ -5142,7 +5142,7 @@
         <p:spPr>
           <a:xfrm>
             <a:off x="7726679" y="1600200"/>
-            <a:ext cx="7315200" cy="320040"/>
+            <a:ext cx="934871" cy="230832"/>
           </a:xfrm>
           <a:prstGeom prst="rect">
             <a:avLst/>
@@ -5156,9 +5156,9 @@
           <a:lstStyle/>
           <a:p>
             <a:r>
-              <a:rPr sz="900" b="1">
-                <a:solidFill>
-                  <a:srgbClr val="4B5563"/>
+              <a:rPr sz="900" b="1" dirty="0">
+                <a:solidFill>
+                  <a:srgbClr val="FF0000"/>
                 </a:solidFill>
                 <a:latin typeface="Calibri"/>
               </a:rPr>
@@ -5176,7 +5176,7 @@
         <p:spPr>
           <a:xfrm>
             <a:off x="7726679" y="1965960"/>
-            <a:ext cx="1554480" cy="347472"/>
+            <a:ext cx="1554480" cy="261610"/>
           </a:xfrm>
           <a:prstGeom prst="rect">
             <a:avLst/>
@@ -5191,9 +5191,9 @@
           <a:p>
             <a:pPr algn="l"/>
             <a:r>
-              <a:rPr sz="1100" b="0" i="0">
-                <a:solidFill>
-                  <a:srgbClr val="4B5563"/>
+              <a:rPr sz="1100" b="0" i="0" dirty="0">
+                <a:solidFill>
+                  <a:srgbClr val="FF0000"/>
                 </a:solidFill>
                 <a:latin typeface="Calibri"/>
               </a:rPr>
@@ -5226,44 +5226,44 @@
           <a:p>
             <a:pPr algn="l"/>
             <a:r>
+              <a:rPr sz="1100" b="0" i="0" dirty="0">
+                <a:solidFill>
+                  <a:srgbClr val="FFFFFF"/>
+                </a:solidFill>
+                <a:latin typeface="Calibri"/>
+              </a:rPr>
+              <a:t>= Margin (BTC) × BTC/USD × Leverage</a:t>
+            </a:r>
+          </a:p>
+        </p:txBody>
+      </p:sp>
+      <p:sp>
+        <p:nvSpPr>
+          <p:cNvPr id="21" name="TextBox 20"/>
+          <p:cNvSpPr txBox="1"/>
+          <p:nvPr/>
+        </p:nvSpPr>
+        <p:spPr>
+          <a:xfrm>
+            <a:off x="7726679" y="2651760"/>
+            <a:ext cx="1554480" cy="261610"/>
+          </a:xfrm>
+          <a:prstGeom prst="rect">
+            <a:avLst/>
+          </a:prstGeom>
+          <a:noFill/>
+        </p:spPr>
+        <p:txBody>
+          <a:bodyPr wrap="square">
+            <a:spAutoFit/>
+          </a:bodyPr>
+          <a:lstStyle/>
+          <a:p>
+            <a:pPr algn="l"/>
+            <a:r>
               <a:rPr sz="1100" b="0" i="0">
                 <a:solidFill>
-                  <a:srgbClr val="FFFFFF"/>
-                </a:solidFill>
-                <a:latin typeface="Calibri"/>
-              </a:rPr>
-              <a:t>= Margin (BTC) × BTC/USD × Leverage</a:t>
-            </a:r>
-          </a:p>
-        </p:txBody>
-      </p:sp>
-      <p:sp>
-        <p:nvSpPr>
-          <p:cNvPr id="21" name="TextBox 20"/>
-          <p:cNvSpPr txBox="1"/>
-          <p:nvPr/>
-        </p:nvSpPr>
-        <p:spPr>
-          <a:xfrm>
-            <a:off x="7726679" y="2651760"/>
-            <a:ext cx="1554480" cy="347472"/>
-          </a:xfrm>
-          <a:prstGeom prst="rect">
-            <a:avLst/>
-          </a:prstGeom>
-          <a:noFill/>
-        </p:spPr>
-        <p:txBody>
-          <a:bodyPr wrap="square">
-            <a:spAutoFit/>
-          </a:bodyPr>
-          <a:lstStyle/>
-          <a:p>
-            <a:pPr algn="l"/>
-            <a:r>
-              <a:rPr sz="1100" b="0" i="0">
-                <a:solidFill>
-                  <a:srgbClr val="4B5563"/>
+                  <a:srgbClr val="FF0000"/>
                 </a:solidFill>
                 <a:latin typeface="Calibri"/>
               </a:rPr>
@@ -5296,44 +5296,44 @@
           <a:p>
             <a:pPr algn="l"/>
             <a:r>
+              <a:rPr sz="1100" b="0" i="0" dirty="0">
+                <a:solidFill>
+                  <a:srgbClr val="FFFFFF"/>
+                </a:solidFill>
+                <a:latin typeface="Calibri"/>
+              </a:rPr>
+              <a:t>= (Pₜ − P₀) / P₀  ×  Notional</a:t>
+            </a:r>
+          </a:p>
+        </p:txBody>
+      </p:sp>
+      <p:sp>
+        <p:nvSpPr>
+          <p:cNvPr id="23" name="TextBox 22"/>
+          <p:cNvSpPr txBox="1"/>
+          <p:nvPr/>
+        </p:nvSpPr>
+        <p:spPr>
+          <a:xfrm>
+            <a:off x="7726679" y="3337560"/>
+            <a:ext cx="1554480" cy="261610"/>
+          </a:xfrm>
+          <a:prstGeom prst="rect">
+            <a:avLst/>
+          </a:prstGeom>
+          <a:noFill/>
+        </p:spPr>
+        <p:txBody>
+          <a:bodyPr wrap="square">
+            <a:spAutoFit/>
+          </a:bodyPr>
+          <a:lstStyle/>
+          <a:p>
+            <a:pPr algn="l"/>
+            <a:r>
               <a:rPr sz="1100" b="0" i="0">
                 <a:solidFill>
-                  <a:srgbClr val="FFFFFF"/>
-                </a:solidFill>
-                <a:latin typeface="Calibri"/>
-              </a:rPr>
-              <a:t>= (Pₜ − P₀) / P₀  ×  Notional</a:t>
-            </a:r>
-          </a:p>
-        </p:txBody>
-      </p:sp>
-      <p:sp>
-        <p:nvSpPr>
-          <p:cNvPr id="23" name="TextBox 22"/>
-          <p:cNvSpPr txBox="1"/>
-          <p:nvPr/>
-        </p:nvSpPr>
-        <p:spPr>
-          <a:xfrm>
-            <a:off x="7726679" y="3337560"/>
-            <a:ext cx="1554480" cy="347472"/>
-          </a:xfrm>
-          <a:prstGeom prst="rect">
-            <a:avLst/>
-          </a:prstGeom>
-          <a:noFill/>
-        </p:spPr>
-        <p:txBody>
-          <a:bodyPr wrap="square">
-            <a:spAutoFit/>
-          </a:bodyPr>
-          <a:lstStyle/>
-          <a:p>
-            <a:pPr algn="l"/>
-            <a:r>
-              <a:rPr sz="1100" b="0" i="0">
-                <a:solidFill>
-                  <a:srgbClr val="4B5563"/>
+                  <a:srgbClr val="FF0000"/>
                 </a:solidFill>
                 <a:latin typeface="Calibri"/>
               </a:rPr>
@@ -5366,44 +5366,62 @@
           <a:p>
             <a:pPr algn="l"/>
             <a:r>
+              <a:rPr sz="1100" b="0" i="0" dirty="0">
+                <a:solidFill>
+                  <a:srgbClr val="FFFFFF"/>
+                </a:solidFill>
+                <a:latin typeface="Calibri"/>
+              </a:rPr>
+              <a:t>= (Margin × BTC/USD + </a:t>
+            </a:r>
+            <a:r>
+              <a:rPr sz="1100" b="0" i="0" dirty="0" err="1">
+                <a:solidFill>
+                  <a:srgbClr val="FFFFFF"/>
+                </a:solidFill>
+                <a:latin typeface="Calibri"/>
+              </a:rPr>
+              <a:t>PnL</a:t>
+            </a:r>
+            <a:r>
+              <a:rPr sz="1100" b="0" i="0" dirty="0">
+                <a:solidFill>
+                  <a:srgbClr val="FFFFFF"/>
+                </a:solidFill>
+                <a:latin typeface="Calibri"/>
+              </a:rPr>
+              <a:t>) / Notional</a:t>
+            </a:r>
+          </a:p>
+        </p:txBody>
+      </p:sp>
+      <p:sp>
+        <p:nvSpPr>
+          <p:cNvPr id="25" name="TextBox 24"/>
+          <p:cNvSpPr txBox="1"/>
+          <p:nvPr/>
+        </p:nvSpPr>
+        <p:spPr>
+          <a:xfrm>
+            <a:off x="7726679" y="4023360"/>
+            <a:ext cx="1554480" cy="261610"/>
+          </a:xfrm>
+          <a:prstGeom prst="rect">
+            <a:avLst/>
+          </a:prstGeom>
+          <a:noFill/>
+        </p:spPr>
+        <p:txBody>
+          <a:bodyPr wrap="square">
+            <a:spAutoFit/>
+          </a:bodyPr>
+          <a:lstStyle/>
+          <a:p>
+            <a:pPr algn="l"/>
+            <a:r>
               <a:rPr sz="1100" b="0" i="0">
                 <a:solidFill>
-                  <a:srgbClr val="FFFFFF"/>
-                </a:solidFill>
-                <a:latin typeface="Calibri"/>
-              </a:rPr>
-              <a:t>= (Margin × BTC/USD + PnL) / Notional</a:t>
-            </a:r>
-          </a:p>
-        </p:txBody>
-      </p:sp>
-      <p:sp>
-        <p:nvSpPr>
-          <p:cNvPr id="25" name="TextBox 24"/>
-          <p:cNvSpPr txBox="1"/>
-          <p:nvPr/>
-        </p:nvSpPr>
-        <p:spPr>
-          <a:xfrm>
-            <a:off x="7726679" y="4023360"/>
-            <a:ext cx="1554480" cy="347472"/>
-          </a:xfrm>
-          <a:prstGeom prst="rect">
-            <a:avLst/>
-          </a:prstGeom>
-          <a:noFill/>
-        </p:spPr>
-        <p:txBody>
-          <a:bodyPr wrap="square">
-            <a:spAutoFit/>
-          </a:bodyPr>
-          <a:lstStyle/>
-          <a:p>
-            <a:pPr algn="l"/>
-            <a:r>
-              <a:rPr sz="1100" b="0" i="0">
-                <a:solidFill>
-                  <a:srgbClr val="4B5563"/>
+                  <a:srgbClr val="FF0000"/>
                 </a:solidFill>
                 <a:latin typeface="Calibri"/>
               </a:rPr>
@@ -5436,44 +5454,44 @@
           <a:p>
             <a:pPr algn="l"/>
             <a:r>
+              <a:rPr sz="1100" b="0" i="0" dirty="0">
+                <a:solidFill>
+                  <a:srgbClr val="FFFFFF"/>
+                </a:solidFill>
+                <a:latin typeface="Calibri"/>
+              </a:rPr>
+              <a:t>= P₀ × (1 − 1/Lev + 0.5%)</a:t>
+            </a:r>
+          </a:p>
+        </p:txBody>
+      </p:sp>
+      <p:sp>
+        <p:nvSpPr>
+          <p:cNvPr id="27" name="TextBox 26"/>
+          <p:cNvSpPr txBox="1"/>
+          <p:nvPr/>
+        </p:nvSpPr>
+        <p:spPr>
+          <a:xfrm>
+            <a:off x="7726679" y="4709160"/>
+            <a:ext cx="1554480" cy="261610"/>
+          </a:xfrm>
+          <a:prstGeom prst="rect">
+            <a:avLst/>
+          </a:prstGeom>
+          <a:noFill/>
+        </p:spPr>
+        <p:txBody>
+          <a:bodyPr wrap="square">
+            <a:spAutoFit/>
+          </a:bodyPr>
+          <a:lstStyle/>
+          <a:p>
+            <a:pPr algn="l"/>
+            <a:r>
               <a:rPr sz="1100" b="0" i="0">
                 <a:solidFill>
-                  <a:srgbClr val="FFFFFF"/>
-                </a:solidFill>
-                <a:latin typeface="Calibri"/>
-              </a:rPr>
-              <a:t>= P₀ × (1 − 1/Lev + 0.5%)</a:t>
-            </a:r>
-          </a:p>
-        </p:txBody>
-      </p:sp>
-      <p:sp>
-        <p:nvSpPr>
-          <p:cNvPr id="27" name="TextBox 26"/>
-          <p:cNvSpPr txBox="1"/>
-          <p:nvPr/>
-        </p:nvSpPr>
-        <p:spPr>
-          <a:xfrm>
-            <a:off x="7726679" y="4709160"/>
-            <a:ext cx="1554480" cy="347472"/>
-          </a:xfrm>
-          <a:prstGeom prst="rect">
-            <a:avLst/>
-          </a:prstGeom>
-          <a:noFill/>
-        </p:spPr>
-        <p:txBody>
-          <a:bodyPr wrap="square">
-            <a:spAutoFit/>
-          </a:bodyPr>
-          <a:lstStyle/>
-          <a:p>
-            <a:pPr algn="l"/>
-            <a:r>
-              <a:rPr sz="1100" b="0" i="0">
-                <a:solidFill>
-                  <a:srgbClr val="4B5563"/>
+                  <a:srgbClr val="FF0000"/>
                 </a:solidFill>
                 <a:latin typeface="Calibri"/>
               </a:rPr>
@@ -5526,7 +5544,7 @@
         <p:spPr>
           <a:xfrm>
             <a:off x="7726679" y="5394960"/>
-            <a:ext cx="1554480" cy="347472"/>
+            <a:ext cx="1554480" cy="261610"/>
           </a:xfrm>
           <a:prstGeom prst="rect">
             <a:avLst/>
@@ -5543,7 +5561,7 @@
             <a:r>
               <a:rPr sz="1100" b="0" i="0">
                 <a:solidFill>
-                  <a:srgbClr val="4B5563"/>
+                  <a:srgbClr val="FF0000"/>
                 </a:solidFill>
                 <a:latin typeface="Calibri"/>
               </a:rPr>
@@ -5801,7 +5819,7 @@
           <a:p>
             <a:pPr algn="l"/>
             <a:r>
-              <a:rPr sz="3600" b="0" i="1">
+              <a:rPr sz="3600" b="0" i="1" dirty="0">
                 <a:solidFill>
                   <a:srgbClr val="FFFFFF"/>
                 </a:solidFill>
@@ -5820,7 +5838,7 @@
         </p:nvSpPr>
         <p:spPr>
           <a:xfrm>
-            <a:off x="777240" y="2148840"/>
+            <a:off x="777240" y="1758878"/>
             <a:ext cx="7772400" cy="338328"/>
           </a:xfrm>
           <a:prstGeom prst="rect">
@@ -5835,26 +5853,318 @@
           <a:lstStyle/>
           <a:p>
             <a:r>
+              <a:rPr sz="1400" dirty="0">
+                <a:solidFill>
+                  <a:srgbClr val="FFFFFF"/>
+                </a:solidFill>
+                <a:latin typeface="Calibri"/>
+              </a:rPr>
+              <a:t>The cold-start problem</a:t>
+            </a:r>
+          </a:p>
+        </p:txBody>
+      </p:sp>
+      <p:sp>
+        <p:nvSpPr>
+          <p:cNvPr id="8" name="TextBox 7"/>
+          <p:cNvSpPr txBox="1"/>
+          <p:nvPr/>
+        </p:nvSpPr>
+        <p:spPr>
+          <a:xfrm>
+            <a:off x="1051560" y="2097206"/>
+            <a:ext cx="7498080" cy="338328"/>
+          </a:xfrm>
+          <a:prstGeom prst="rect">
+            <a:avLst/>
+          </a:prstGeom>
+          <a:noFill/>
+        </p:spPr>
+        <p:txBody>
+          <a:bodyPr wrap="none">
+            <a:spAutoFit/>
+          </a:bodyPr>
+          <a:lstStyle/>
+          <a:p>
+            <a:r>
+              <a:rPr sz="1200" dirty="0">
+                <a:solidFill>
+                  <a:srgbClr val="9CA3AF"/>
+                </a:solidFill>
+                <a:latin typeface="Calibri"/>
+              </a:rPr>
+              <a:t>• A new marketplace has no organic order flow — no liquidity = no traders.</a:t>
+            </a:r>
+          </a:p>
+        </p:txBody>
+      </p:sp>
+      <p:sp>
+        <p:nvSpPr>
+          <p:cNvPr id="9" name="TextBox 8"/>
+          <p:cNvSpPr txBox="1"/>
+          <p:nvPr/>
+        </p:nvSpPr>
+        <p:spPr>
+          <a:xfrm>
+            <a:off x="1051560" y="2435534"/>
+            <a:ext cx="7498080" cy="338328"/>
+          </a:xfrm>
+          <a:prstGeom prst="rect">
+            <a:avLst/>
+          </a:prstGeom>
+          <a:noFill/>
+        </p:spPr>
+        <p:txBody>
+          <a:bodyPr wrap="none">
+            <a:spAutoFit/>
+          </a:bodyPr>
+          <a:lstStyle/>
+          <a:p>
+            <a:r>
+              <a:rPr sz="1200" dirty="0">
+                <a:solidFill>
+                  <a:srgbClr val="9CA3AF"/>
+                </a:solidFill>
+                <a:latin typeface="Calibri"/>
+              </a:rPr>
+              <a:t>• VMM seeds the market with synthetic bid/ask depth from day one.</a:t>
+            </a:r>
+          </a:p>
+        </p:txBody>
+      </p:sp>
+      <p:sp>
+        <p:nvSpPr>
+          <p:cNvPr id="11" name="TextBox 10"/>
+          <p:cNvSpPr txBox="1"/>
+          <p:nvPr/>
+        </p:nvSpPr>
+        <p:spPr>
+          <a:xfrm>
+            <a:off x="777240" y="3112190"/>
+            <a:ext cx="7772400" cy="338328"/>
+          </a:xfrm>
+          <a:prstGeom prst="rect">
+            <a:avLst/>
+          </a:prstGeom>
+          <a:noFill/>
+        </p:spPr>
+        <p:txBody>
+          <a:bodyPr wrap="none">
+            <a:spAutoFit/>
+          </a:bodyPr>
+          <a:lstStyle/>
+          <a:p>
+            <a:r>
+              <a:rPr sz="1400" dirty="0">
+                <a:solidFill>
+                  <a:srgbClr val="22C55E"/>
+                </a:solidFill>
+                <a:latin typeface="Calibri"/>
+              </a:rPr>
+              <a:t>Geometric Brownian Motion (GBM)</a:t>
+            </a:r>
+          </a:p>
+        </p:txBody>
+      </p:sp>
+      <p:sp>
+        <p:nvSpPr>
+          <p:cNvPr id="12" name="TextBox 11"/>
+          <p:cNvSpPr txBox="1"/>
+          <p:nvPr/>
+        </p:nvSpPr>
+        <p:spPr>
+          <a:xfrm>
+            <a:off x="1051560" y="3450518"/>
+            <a:ext cx="7498080" cy="338328"/>
+          </a:xfrm>
+          <a:prstGeom prst="rect">
+            <a:avLst/>
+          </a:prstGeom>
+          <a:noFill/>
+        </p:spPr>
+        <p:txBody>
+          <a:bodyPr wrap="none">
+            <a:spAutoFit/>
+          </a:bodyPr>
+          <a:lstStyle/>
+          <a:p>
+            <a:r>
+              <a:rPr sz="1200" dirty="0">
+                <a:solidFill>
+                  <a:srgbClr val="F59E0B"/>
+                </a:solidFill>
+                <a:latin typeface="Calibri"/>
+              </a:rPr>
+              <a:t>• Price follows:  Sₜ₊₁ = Sₜ · exp( (μ − σ²/2)·</a:t>
+            </a:r>
+            <a:r>
+              <a:rPr sz="1200" dirty="0" err="1">
+                <a:solidFill>
+                  <a:srgbClr val="F59E0B"/>
+                </a:solidFill>
+                <a:latin typeface="Calibri"/>
+              </a:rPr>
+              <a:t>Δt</a:t>
+            </a:r>
+            <a:r>
+              <a:rPr sz="1200" dirty="0">
+                <a:solidFill>
+                  <a:srgbClr val="F59E0B"/>
+                </a:solidFill>
+                <a:latin typeface="Calibri"/>
+              </a:rPr>
+              <a:t> + </a:t>
+            </a:r>
+            <a:r>
+              <a:rPr sz="1200" dirty="0" err="1">
+                <a:solidFill>
+                  <a:srgbClr val="F59E0B"/>
+                </a:solidFill>
+                <a:latin typeface="Calibri"/>
+              </a:rPr>
+              <a:t>σ·ε</a:t>
+            </a:r>
+            <a:r>
+              <a:rPr sz="1200" dirty="0">
+                <a:solidFill>
+                  <a:srgbClr val="F59E0B"/>
+                </a:solidFill>
+                <a:latin typeface="Calibri"/>
+              </a:rPr>
+              <a:t>·√</a:t>
+            </a:r>
+            <a:r>
+              <a:rPr sz="1200" dirty="0" err="1">
+                <a:solidFill>
+                  <a:srgbClr val="F59E0B"/>
+                </a:solidFill>
+                <a:latin typeface="Calibri"/>
+              </a:rPr>
+              <a:t>Δt</a:t>
+            </a:r>
+            <a:r>
+              <a:rPr sz="1200" dirty="0">
+                <a:solidFill>
+                  <a:srgbClr val="F59E0B"/>
+                </a:solidFill>
+                <a:latin typeface="Calibri"/>
+              </a:rPr>
+              <a:t> )</a:t>
+            </a:r>
+          </a:p>
+        </p:txBody>
+      </p:sp>
+      <p:sp>
+        <p:nvSpPr>
+          <p:cNvPr id="13" name="TextBox 12"/>
+          <p:cNvSpPr txBox="1"/>
+          <p:nvPr/>
+        </p:nvSpPr>
+        <p:spPr>
+          <a:xfrm>
+            <a:off x="1051560" y="3788846"/>
+            <a:ext cx="7498080" cy="338328"/>
+          </a:xfrm>
+          <a:prstGeom prst="rect">
+            <a:avLst/>
+          </a:prstGeom>
+          <a:noFill/>
+        </p:spPr>
+        <p:txBody>
+          <a:bodyPr wrap="none">
+            <a:spAutoFit/>
+          </a:bodyPr>
+          <a:lstStyle/>
+          <a:p>
+            <a:r>
+              <a:rPr sz="1200" dirty="0">
+                <a:solidFill>
+                  <a:srgbClr val="9CA3AF"/>
+                </a:solidFill>
+                <a:latin typeface="Calibri"/>
+              </a:rPr>
+              <a:t>• μ = 0.00006  (slight upward drift)     σ = 0.008  (per 2s tick)</a:t>
+            </a:r>
+          </a:p>
+        </p:txBody>
+      </p:sp>
+      <p:sp>
+        <p:nvSpPr>
+          <p:cNvPr id="14" name="TextBox 13"/>
+          <p:cNvSpPr txBox="1"/>
+          <p:nvPr/>
+        </p:nvSpPr>
+        <p:spPr>
+          <a:xfrm>
+            <a:off x="1051560" y="4127174"/>
+            <a:ext cx="7498080" cy="338328"/>
+          </a:xfrm>
+          <a:prstGeom prst="rect">
+            <a:avLst/>
+          </a:prstGeom>
+          <a:noFill/>
+        </p:spPr>
+        <p:txBody>
+          <a:bodyPr wrap="none">
+            <a:spAutoFit/>
+          </a:bodyPr>
+          <a:lstStyle/>
+          <a:p>
+            <a:r>
+              <a:rPr sz="1200">
+                <a:solidFill>
+                  <a:srgbClr val="9CA3AF"/>
+                </a:solidFill>
+                <a:latin typeface="Calibri"/>
+              </a:rPr>
+              <a:t>• ε ~ N(0,1) via Box-Muller transform — true randomness, not pseudo-uniform.</a:t>
+            </a:r>
+          </a:p>
+        </p:txBody>
+      </p:sp>
+      <p:sp>
+        <p:nvSpPr>
+          <p:cNvPr id="16" name="TextBox 15"/>
+          <p:cNvSpPr txBox="1"/>
+          <p:nvPr/>
+        </p:nvSpPr>
+        <p:spPr>
+          <a:xfrm>
+            <a:off x="777240" y="4803830"/>
+            <a:ext cx="7772400" cy="338328"/>
+          </a:xfrm>
+          <a:prstGeom prst="rect">
+            <a:avLst/>
+          </a:prstGeom>
+          <a:noFill/>
+        </p:spPr>
+        <p:txBody>
+          <a:bodyPr wrap="none">
+            <a:spAutoFit/>
+          </a:bodyPr>
+          <a:lstStyle/>
+          <a:p>
+            <a:r>
               <a:rPr sz="1400">
                 <a:solidFill>
-                  <a:srgbClr val="FFFFFF"/>
-                </a:solidFill>
-                <a:latin typeface="Calibri"/>
-              </a:rPr>
-              <a:t>The cold-start problem</a:t>
-            </a:r>
-          </a:p>
-        </p:txBody>
-      </p:sp>
-      <p:sp>
-        <p:nvSpPr>
-          <p:cNvPr id="8" name="TextBox 7"/>
-          <p:cNvSpPr txBox="1"/>
-          <p:nvPr/>
-        </p:nvSpPr>
-        <p:spPr>
-          <a:xfrm>
-            <a:off x="1051560" y="2487168"/>
+                  <a:srgbClr val="22C55E"/>
+                </a:solidFill>
+                <a:latin typeface="Calibri"/>
+              </a:rPr>
+              <a:t>Order Book Injection</a:t>
+            </a:r>
+          </a:p>
+        </p:txBody>
+      </p:sp>
+      <p:sp>
+        <p:nvSpPr>
+          <p:cNvPr id="17" name="TextBox 16"/>
+          <p:cNvSpPr txBox="1"/>
+          <p:nvPr/>
+        </p:nvSpPr>
+        <p:spPr>
+          <a:xfrm>
+            <a:off x="1051560" y="5142158"/>
             <a:ext cx="7498080" cy="338328"/>
           </a:xfrm>
           <a:prstGeom prst="rect">
@@ -5875,20 +6185,20 @@
                 </a:solidFill>
                 <a:latin typeface="Calibri"/>
               </a:rPr>
-              <a:t>• A new marketplace has no organic order flow — no liquidity = no traders.</a:t>
-            </a:r>
-          </a:p>
-        </p:txBody>
-      </p:sp>
-      <p:sp>
-        <p:nvSpPr>
-          <p:cNvPr id="9" name="TextBox 8"/>
-          <p:cNvSpPr txBox="1"/>
-          <p:nvPr/>
-        </p:nvSpPr>
-        <p:spPr>
-          <a:xfrm>
-            <a:off x="1051560" y="2825496"/>
+              <a:t>• 10 VMM levels per side at ±0.3 % spacing, regenerated every 2 seconds.</a:t>
+            </a:r>
+          </a:p>
+        </p:txBody>
+      </p:sp>
+      <p:sp>
+        <p:nvSpPr>
+          <p:cNvPr id="18" name="TextBox 17"/>
+          <p:cNvSpPr txBox="1"/>
+          <p:nvPr/>
+        </p:nvSpPr>
+        <p:spPr>
+          <a:xfrm>
+            <a:off x="1051560" y="5480486"/>
             <a:ext cx="7498080" cy="338328"/>
           </a:xfrm>
           <a:prstGeom prst="rect">
@@ -5909,20 +6219,20 @@
                 </a:solidFill>
                 <a:latin typeface="Calibri"/>
               </a:rPr>
-              <a:t>• VMM seeds the market with synthetic bid/ask depth from day one.</a:t>
-            </a:r>
-          </a:p>
-        </p:txBody>
-      </p:sp>
-      <p:sp>
-        <p:nvSpPr>
-          <p:cNvPr id="10" name="TextBox 9"/>
-          <p:cNvSpPr txBox="1"/>
-          <p:nvPr/>
-        </p:nvSpPr>
-        <p:spPr>
-          <a:xfrm>
-            <a:off x="777240" y="3163824"/>
+              <a:t>• 3–5 fake 'user' orders injected randomly to create organic-looking depth.</a:t>
+            </a:r>
+          </a:p>
+        </p:txBody>
+      </p:sp>
+      <p:sp>
+        <p:nvSpPr>
+          <p:cNvPr id="20" name="TextBox 19"/>
+          <p:cNvSpPr txBox="1"/>
+          <p:nvPr/>
+        </p:nvSpPr>
+        <p:spPr>
+          <a:xfrm>
+            <a:off x="777240" y="6067496"/>
             <a:ext cx="7772400" cy="338328"/>
           </a:xfrm>
           <a:prstGeom prst="rect">
@@ -5936,20 +6246,28 @@
           </a:bodyPr>
           <a:lstStyle/>
           <a:p>
-            <a:endParaRPr/>
-          </a:p>
-        </p:txBody>
-      </p:sp>
-      <p:sp>
-        <p:nvSpPr>
-          <p:cNvPr id="11" name="TextBox 10"/>
-          <p:cNvSpPr txBox="1"/>
-          <p:nvPr/>
-        </p:nvSpPr>
-        <p:spPr>
-          <a:xfrm>
-            <a:off x="777240" y="3502152"/>
-            <a:ext cx="7772400" cy="338328"/>
+            <a:r>
+              <a:rPr sz="1400">
+                <a:solidFill>
+                  <a:srgbClr val="22C55E"/>
+                </a:solidFill>
+                <a:latin typeface="Calibri"/>
+              </a:rPr>
+              <a:t>BTC Simulation</a:t>
+            </a:r>
+          </a:p>
+        </p:txBody>
+      </p:sp>
+      <p:sp>
+        <p:nvSpPr>
+          <p:cNvPr id="21" name="TextBox 20"/>
+          <p:cNvSpPr txBox="1"/>
+          <p:nvPr/>
+        </p:nvSpPr>
+        <p:spPr>
+          <a:xfrm>
+            <a:off x="1051560" y="6405824"/>
+            <a:ext cx="7498080" cy="338328"/>
           </a:xfrm>
           <a:prstGeom prst="rect">
             <a:avLst/>
@@ -5963,331 +6281,7 @@
           <a:lstStyle/>
           <a:p>
             <a:r>
-              <a:rPr sz="1400">
-                <a:solidFill>
-                  <a:srgbClr val="22C55E"/>
-                </a:solidFill>
-                <a:latin typeface="Calibri"/>
-              </a:rPr>
-              <a:t>Geometric Brownian Motion (GBM)</a:t>
-            </a:r>
-          </a:p>
-        </p:txBody>
-      </p:sp>
-      <p:sp>
-        <p:nvSpPr>
-          <p:cNvPr id="12" name="TextBox 11"/>
-          <p:cNvSpPr txBox="1"/>
-          <p:nvPr/>
-        </p:nvSpPr>
-        <p:spPr>
-          <a:xfrm>
-            <a:off x="1051560" y="3840480"/>
-            <a:ext cx="7498080" cy="338328"/>
-          </a:xfrm>
-          <a:prstGeom prst="rect">
-            <a:avLst/>
-          </a:prstGeom>
-          <a:noFill/>
-        </p:spPr>
-        <p:txBody>
-          <a:bodyPr wrap="none">
-            <a:spAutoFit/>
-          </a:bodyPr>
-          <a:lstStyle/>
-          <a:p>
-            <a:r>
-              <a:rPr sz="1200">
-                <a:solidFill>
-                  <a:srgbClr val="F59E0B"/>
-                </a:solidFill>
-                <a:latin typeface="Calibri"/>
-              </a:rPr>
-              <a:t>• Price follows:  Sₜ₊₁ = Sₜ · exp( (μ − σ²/2)·Δt + σ·ε·√Δt )</a:t>
-            </a:r>
-          </a:p>
-        </p:txBody>
-      </p:sp>
-      <p:sp>
-        <p:nvSpPr>
-          <p:cNvPr id="13" name="TextBox 12"/>
-          <p:cNvSpPr txBox="1"/>
-          <p:nvPr/>
-        </p:nvSpPr>
-        <p:spPr>
-          <a:xfrm>
-            <a:off x="1051560" y="4178808"/>
-            <a:ext cx="7498080" cy="338328"/>
-          </a:xfrm>
-          <a:prstGeom prst="rect">
-            <a:avLst/>
-          </a:prstGeom>
-          <a:noFill/>
-        </p:spPr>
-        <p:txBody>
-          <a:bodyPr wrap="none">
-            <a:spAutoFit/>
-          </a:bodyPr>
-          <a:lstStyle/>
-          <a:p>
-            <a:r>
-              <a:rPr sz="1200">
-                <a:solidFill>
-                  <a:srgbClr val="9CA3AF"/>
-                </a:solidFill>
-                <a:latin typeface="Calibri"/>
-              </a:rPr>
-              <a:t>• μ = 0.00006  (slight upward drift)     σ = 0.008  (per 2s tick)</a:t>
-            </a:r>
-          </a:p>
-        </p:txBody>
-      </p:sp>
-      <p:sp>
-        <p:nvSpPr>
-          <p:cNvPr id="14" name="TextBox 13"/>
-          <p:cNvSpPr txBox="1"/>
-          <p:nvPr/>
-        </p:nvSpPr>
-        <p:spPr>
-          <a:xfrm>
-            <a:off x="1051560" y="4517136"/>
-            <a:ext cx="7498080" cy="338328"/>
-          </a:xfrm>
-          <a:prstGeom prst="rect">
-            <a:avLst/>
-          </a:prstGeom>
-          <a:noFill/>
-        </p:spPr>
-        <p:txBody>
-          <a:bodyPr wrap="none">
-            <a:spAutoFit/>
-          </a:bodyPr>
-          <a:lstStyle/>
-          <a:p>
-            <a:r>
-              <a:rPr sz="1200">
-                <a:solidFill>
-                  <a:srgbClr val="9CA3AF"/>
-                </a:solidFill>
-                <a:latin typeface="Calibri"/>
-              </a:rPr>
-              <a:t>• ε ~ N(0,1) via Box-Muller transform — true randomness, not pseudo-uniform.</a:t>
-            </a:r>
-          </a:p>
-        </p:txBody>
-      </p:sp>
-      <p:sp>
-        <p:nvSpPr>
-          <p:cNvPr id="15" name="TextBox 14"/>
-          <p:cNvSpPr txBox="1"/>
-          <p:nvPr/>
-        </p:nvSpPr>
-        <p:spPr>
-          <a:xfrm>
-            <a:off x="777240" y="4855464"/>
-            <a:ext cx="7772400" cy="338328"/>
-          </a:xfrm>
-          <a:prstGeom prst="rect">
-            <a:avLst/>
-          </a:prstGeom>
-          <a:noFill/>
-        </p:spPr>
-        <p:txBody>
-          <a:bodyPr wrap="none">
-            <a:spAutoFit/>
-          </a:bodyPr>
-          <a:lstStyle/>
-          <a:p>
-            <a:endParaRPr/>
-          </a:p>
-        </p:txBody>
-      </p:sp>
-      <p:sp>
-        <p:nvSpPr>
-          <p:cNvPr id="16" name="TextBox 15"/>
-          <p:cNvSpPr txBox="1"/>
-          <p:nvPr/>
-        </p:nvSpPr>
-        <p:spPr>
-          <a:xfrm>
-            <a:off x="777240" y="5193792"/>
-            <a:ext cx="7772400" cy="338328"/>
-          </a:xfrm>
-          <a:prstGeom prst="rect">
-            <a:avLst/>
-          </a:prstGeom>
-          <a:noFill/>
-        </p:spPr>
-        <p:txBody>
-          <a:bodyPr wrap="none">
-            <a:spAutoFit/>
-          </a:bodyPr>
-          <a:lstStyle/>
-          <a:p>
-            <a:r>
-              <a:rPr sz="1400">
-                <a:solidFill>
-                  <a:srgbClr val="22C55E"/>
-                </a:solidFill>
-                <a:latin typeface="Calibri"/>
-              </a:rPr>
-              <a:t>Order Book Injection</a:t>
-            </a:r>
-          </a:p>
-        </p:txBody>
-      </p:sp>
-      <p:sp>
-        <p:nvSpPr>
-          <p:cNvPr id="17" name="TextBox 16"/>
-          <p:cNvSpPr txBox="1"/>
-          <p:nvPr/>
-        </p:nvSpPr>
-        <p:spPr>
-          <a:xfrm>
-            <a:off x="1051560" y="5532120"/>
-            <a:ext cx="7498080" cy="338328"/>
-          </a:xfrm>
-          <a:prstGeom prst="rect">
-            <a:avLst/>
-          </a:prstGeom>
-          <a:noFill/>
-        </p:spPr>
-        <p:txBody>
-          <a:bodyPr wrap="none">
-            <a:spAutoFit/>
-          </a:bodyPr>
-          <a:lstStyle/>
-          <a:p>
-            <a:r>
-              <a:rPr sz="1200">
-                <a:solidFill>
-                  <a:srgbClr val="9CA3AF"/>
-                </a:solidFill>
-                <a:latin typeface="Calibri"/>
-              </a:rPr>
-              <a:t>• 10 VMM levels per side at ±0.3 % spacing, regenerated every 2 seconds.</a:t>
-            </a:r>
-          </a:p>
-        </p:txBody>
-      </p:sp>
-      <p:sp>
-        <p:nvSpPr>
-          <p:cNvPr id="18" name="TextBox 17"/>
-          <p:cNvSpPr txBox="1"/>
-          <p:nvPr/>
-        </p:nvSpPr>
-        <p:spPr>
-          <a:xfrm>
-            <a:off x="1051560" y="5870448"/>
-            <a:ext cx="7498080" cy="338328"/>
-          </a:xfrm>
-          <a:prstGeom prst="rect">
-            <a:avLst/>
-          </a:prstGeom>
-          <a:noFill/>
-        </p:spPr>
-        <p:txBody>
-          <a:bodyPr wrap="none">
-            <a:spAutoFit/>
-          </a:bodyPr>
-          <a:lstStyle/>
-          <a:p>
-            <a:r>
-              <a:rPr sz="1200">
-                <a:solidFill>
-                  <a:srgbClr val="9CA3AF"/>
-                </a:solidFill>
-                <a:latin typeface="Calibri"/>
-              </a:rPr>
-              <a:t>• 3–5 fake 'user' orders injected randomly to create organic-looking depth.</a:t>
-            </a:r>
-          </a:p>
-        </p:txBody>
-      </p:sp>
-      <p:sp>
-        <p:nvSpPr>
-          <p:cNvPr id="19" name="TextBox 18"/>
-          <p:cNvSpPr txBox="1"/>
-          <p:nvPr/>
-        </p:nvSpPr>
-        <p:spPr>
-          <a:xfrm>
-            <a:off x="777240" y="6208776"/>
-            <a:ext cx="7772400" cy="338328"/>
-          </a:xfrm>
-          <a:prstGeom prst="rect">
-            <a:avLst/>
-          </a:prstGeom>
-          <a:noFill/>
-        </p:spPr>
-        <p:txBody>
-          <a:bodyPr wrap="none">
-            <a:spAutoFit/>
-          </a:bodyPr>
-          <a:lstStyle/>
-          <a:p>
-            <a:endParaRPr/>
-          </a:p>
-        </p:txBody>
-      </p:sp>
-      <p:sp>
-        <p:nvSpPr>
-          <p:cNvPr id="20" name="TextBox 19"/>
-          <p:cNvSpPr txBox="1"/>
-          <p:nvPr/>
-        </p:nvSpPr>
-        <p:spPr>
-          <a:xfrm>
-            <a:off x="777240" y="6547104"/>
-            <a:ext cx="7772400" cy="338328"/>
-          </a:xfrm>
-          <a:prstGeom prst="rect">
-            <a:avLst/>
-          </a:prstGeom>
-          <a:noFill/>
-        </p:spPr>
-        <p:txBody>
-          <a:bodyPr wrap="none">
-            <a:spAutoFit/>
-          </a:bodyPr>
-          <a:lstStyle/>
-          <a:p>
-            <a:r>
-              <a:rPr sz="1400">
-                <a:solidFill>
-                  <a:srgbClr val="22C55E"/>
-                </a:solidFill>
-                <a:latin typeface="Calibri"/>
-              </a:rPr>
-              <a:t>BTC Simulation</a:t>
-            </a:r>
-          </a:p>
-        </p:txBody>
-      </p:sp>
-      <p:sp>
-        <p:nvSpPr>
-          <p:cNvPr id="21" name="TextBox 20"/>
-          <p:cNvSpPr txBox="1"/>
-          <p:nvPr/>
-        </p:nvSpPr>
-        <p:spPr>
-          <a:xfrm>
-            <a:off x="1051560" y="6885432"/>
-            <a:ext cx="7498080" cy="338328"/>
-          </a:xfrm>
-          <a:prstGeom prst="rect">
-            <a:avLst/>
-          </a:prstGeom>
-          <a:noFill/>
-        </p:spPr>
-        <p:txBody>
-          <a:bodyPr wrap="none">
-            <a:spAutoFit/>
-          </a:bodyPr>
-          <a:lstStyle/>
-          <a:p>
-            <a:r>
-              <a:rPr sz="1200">
+              <a:rPr sz="1200" dirty="0">
                 <a:solidFill>
                   <a:srgbClr val="9CA3AF"/>
                 </a:solidFill>
@@ -6353,7 +6347,7 @@
         <p:spPr>
           <a:xfrm>
             <a:off x="9144000" y="2240280"/>
-            <a:ext cx="914400" cy="347472"/>
+            <a:ext cx="914400" cy="246221"/>
           </a:xfrm>
           <a:prstGeom prst="rect">
             <a:avLst/>
@@ -6368,9 +6362,9 @@
           <a:p>
             <a:pPr algn="l"/>
             <a:r>
-              <a:rPr sz="1000" b="0" i="0">
-                <a:solidFill>
-                  <a:srgbClr val="4B5563"/>
+              <a:rPr sz="1000" b="0" i="0" dirty="0">
+                <a:solidFill>
+                  <a:schemeClr val="bg1"/>
                 </a:solidFill>
                 <a:latin typeface="Calibri"/>
               </a:rPr>
@@ -6403,14 +6397,29 @@
           <a:p>
             <a:pPr algn="l"/>
             <a:r>
-              <a:rPr sz="1300" b="1" i="0">
+              <a:rPr sz="1300" b="1" i="0" dirty="0">
                 <a:solidFill>
                   <a:srgbClr val="22C55E"/>
                 </a:solidFill>
                 <a:latin typeface="Calibri"/>
               </a:rPr>
-              <a:t>2 000 ms</a:t>
-            </a:r>
+              <a:t>2 000 </a:t>
+            </a:r>
+            <a:r>
+              <a:rPr sz="1300" b="1" i="0" dirty="0" err="1">
+                <a:solidFill>
+                  <a:srgbClr val="22C55E"/>
+                </a:solidFill>
+                <a:latin typeface="Calibri"/>
+              </a:rPr>
+              <a:t>ms</a:t>
+            </a:r>
+            <a:endParaRPr sz="1300" b="1" i="0" dirty="0">
+              <a:solidFill>
+                <a:srgbClr val="22C55E"/>
+              </a:solidFill>
+              <a:latin typeface="Calibri"/>
+            </a:endParaRPr>
           </a:p>
         </p:txBody>
       </p:sp>
@@ -6423,7 +6432,7 @@
         <p:spPr>
           <a:xfrm>
             <a:off x="9144000" y="2834640"/>
-            <a:ext cx="914400" cy="347472"/>
+            <a:ext cx="914400" cy="246221"/>
           </a:xfrm>
           <a:prstGeom prst="rect">
             <a:avLst/>
@@ -6438,9 +6447,9 @@
           <a:p>
             <a:pPr algn="l"/>
             <a:r>
-              <a:rPr sz="1000" b="0" i="0">
-                <a:solidFill>
-                  <a:srgbClr val="4B5563"/>
+              <a:rPr sz="1000" b="0" i="0" dirty="0">
+                <a:solidFill>
+                  <a:schemeClr val="bg1"/>
                 </a:solidFill>
                 <a:latin typeface="Calibri"/>
               </a:rPr>
@@ -6493,7 +6502,7 @@
         <p:spPr>
           <a:xfrm>
             <a:off x="9144000" y="3429000"/>
-            <a:ext cx="914400" cy="347472"/>
+            <a:ext cx="914400" cy="246221"/>
           </a:xfrm>
           <a:prstGeom prst="rect">
             <a:avLst/>
@@ -6510,7 +6519,7 @@
             <a:r>
               <a:rPr sz="1000" b="0" i="0">
                 <a:solidFill>
-                  <a:srgbClr val="4B5563"/>
+                  <a:schemeClr val="bg1"/>
                 </a:solidFill>
                 <a:latin typeface="Calibri"/>
               </a:rPr>
@@ -6563,7 +6572,7 @@
         <p:spPr>
           <a:xfrm>
             <a:off x="9144000" y="4023360"/>
-            <a:ext cx="914400" cy="347472"/>
+            <a:ext cx="914400" cy="246221"/>
           </a:xfrm>
           <a:prstGeom prst="rect">
             <a:avLst/>
@@ -6580,7 +6589,7 @@
             <a:r>
               <a:rPr sz="1000" b="0" i="0">
                 <a:solidFill>
-                  <a:srgbClr val="4B5563"/>
+                  <a:schemeClr val="bg1"/>
                 </a:solidFill>
                 <a:latin typeface="Calibri"/>
               </a:rPr>
@@ -6633,7 +6642,7 @@
         <p:spPr>
           <a:xfrm>
             <a:off x="9144000" y="4617720"/>
-            <a:ext cx="914400" cy="347472"/>
+            <a:ext cx="914400" cy="246221"/>
           </a:xfrm>
           <a:prstGeom prst="rect">
             <a:avLst/>
@@ -6650,7 +6659,7 @@
             <a:r>
               <a:rPr sz="1000" b="0" i="0">
                 <a:solidFill>
-                  <a:srgbClr val="4B5563"/>
+                  <a:schemeClr val="bg1"/>
                 </a:solidFill>
                 <a:latin typeface="Calibri"/>
               </a:rPr>
@@ -6703,7 +6712,7 @@
         <p:spPr>
           <a:xfrm>
             <a:off x="9144000" y="5212080"/>
-            <a:ext cx="914400" cy="347472"/>
+            <a:ext cx="914400" cy="246221"/>
           </a:xfrm>
           <a:prstGeom prst="rect">
             <a:avLst/>
@@ -6720,7 +6729,7 @@
             <a:r>
               <a:rPr sz="1000" b="0" i="0">
                 <a:solidFill>
-                  <a:srgbClr val="4B5563"/>
+                  <a:schemeClr val="bg1"/>
                 </a:solidFill>
                 <a:latin typeface="Calibri"/>
               </a:rPr>
@@ -7103,7 +7112,7 @@
           <a:p>
             <a:pPr algn="l"/>
             <a:r>
-              <a:rPr sz="1300" b="1" i="0">
+              <a:rPr sz="1300" b="1" i="0" dirty="0">
                 <a:solidFill>
                   <a:srgbClr val="E8552A"/>
                 </a:solidFill>
@@ -7138,7 +7147,7 @@
           <a:p>
             <a:pPr algn="l"/>
             <a:r>
-              <a:rPr sz="1100" b="0" i="0">
+              <a:rPr sz="1100" b="0" i="0" dirty="0">
                 <a:solidFill>
                   <a:srgbClr val="9CA3AF"/>
                 </a:solidFill>
@@ -9620,13 +9629,40 @@
           <a:p>
             <a:pPr algn="l"/>
             <a:r>
-              <a:rPr sz="1200" b="0" i="0">
+              <a:rPr sz="1200" b="0" i="0" dirty="0" err="1">
                 <a:solidFill>
                   <a:srgbClr val="9CA3AF"/>
                 </a:solidFill>
                 <a:latin typeface="Calibri"/>
               </a:rPr>
-              <a:t>Pinia trading store · GBM VMM engine · CoinGecko live crypto feed (via Vite proxy)</a:t>
+              <a:t>Pinia</a:t>
+            </a:r>
+            <a:r>
+              <a:rPr sz="1200" b="0" i="0" dirty="0">
+                <a:solidFill>
+                  <a:srgbClr val="9CA3AF"/>
+                </a:solidFill>
+                <a:latin typeface="Calibri"/>
+              </a:rPr>
+              <a:t> trading store · GBM VMM engine · </a:t>
+            </a:r>
+            <a:r>
+              <a:rPr sz="1200" b="0" i="0" dirty="0" err="1">
+                <a:solidFill>
+                  <a:srgbClr val="9CA3AF"/>
+                </a:solidFill>
+                <a:latin typeface="Calibri"/>
+              </a:rPr>
+              <a:t>CoinGecko</a:t>
+            </a:r>
+            <a:r>
+              <a:rPr sz="1200" b="0" i="0" dirty="0">
+                <a:solidFill>
+                  <a:srgbClr val="9CA3AF"/>
+                </a:solidFill>
+                <a:latin typeface="Calibri"/>
+              </a:rPr>
+              <a:t> live crypto feed (via Vite proxy)</a:t>
             </a:r>
           </a:p>
         </p:txBody>
@@ -11732,7 +11768,7 @@
           <a:p>
             <a:pPr algn="l"/>
             <a:r>
-              <a:rPr sz="3800" b="0" i="1">
+              <a:rPr sz="3800" b="0" i="1" dirty="0">
                 <a:solidFill>
                   <a:srgbClr val="FECACA"/>
                 </a:solidFill>
@@ -11802,7 +11838,7 @@
           <a:p>
             <a:pPr algn="l"/>
             <a:r>
-              <a:rPr sz="1150" b="0" i="0">
+              <a:rPr sz="1150" b="0" i="0" dirty="0">
                 <a:solidFill>
                   <a:srgbClr val="71717A"/>
                 </a:solidFill>
@@ -11942,7 +11978,7 @@
           <a:p>
             <a:pPr algn="l"/>
             <a:r>
-              <a:rPr sz="1150" b="0" i="0">
+              <a:rPr sz="1150" b="0" i="0" dirty="0">
                 <a:solidFill>
                   <a:srgbClr val="71717A"/>
                 </a:solidFill>
